--- a/res/sandbox.pptx
+++ b/res/sandbox.pptx
@@ -271,7 +271,7 @@
           <a:p>
             <a:fld id="{C8DDD9C9-7601-0A49-8CCB-092BA4B39752}" type="datetimeFigureOut">
               <a:rPr lang="en-US" smtClean="0"/>
-              <a:t>2/7/25</a:t>
+              <a:t>9/10/26</a:t>
             </a:fld>
             <a:endParaRPr lang="en-US"/>
           </a:p>
@@ -471,7 +471,7 @@
           <a:p>
             <a:fld id="{C8DDD9C9-7601-0A49-8CCB-092BA4B39752}" type="datetimeFigureOut">
               <a:rPr lang="en-US" smtClean="0"/>
-              <a:t>2/7/25</a:t>
+              <a:t>9/10/26</a:t>
             </a:fld>
             <a:endParaRPr lang="en-US"/>
           </a:p>
@@ -681,7 +681,7 @@
           <a:p>
             <a:fld id="{C8DDD9C9-7601-0A49-8CCB-092BA4B39752}" type="datetimeFigureOut">
               <a:rPr lang="en-US" smtClean="0"/>
-              <a:t>2/7/25</a:t>
+              <a:t>9/10/26</a:t>
             </a:fld>
             <a:endParaRPr lang="en-US"/>
           </a:p>
@@ -881,7 +881,7 @@
           <a:p>
             <a:fld id="{C8DDD9C9-7601-0A49-8CCB-092BA4B39752}" type="datetimeFigureOut">
               <a:rPr lang="en-US" smtClean="0"/>
-              <a:t>2/7/25</a:t>
+              <a:t>9/10/26</a:t>
             </a:fld>
             <a:endParaRPr lang="en-US"/>
           </a:p>
@@ -1157,7 +1157,7 @@
           <a:p>
             <a:fld id="{C8DDD9C9-7601-0A49-8CCB-092BA4B39752}" type="datetimeFigureOut">
               <a:rPr lang="en-US" smtClean="0"/>
-              <a:t>2/7/25</a:t>
+              <a:t>9/10/26</a:t>
             </a:fld>
             <a:endParaRPr lang="en-US"/>
           </a:p>
@@ -1425,7 +1425,7 @@
           <a:p>
             <a:fld id="{C8DDD9C9-7601-0A49-8CCB-092BA4B39752}" type="datetimeFigureOut">
               <a:rPr lang="en-US" smtClean="0"/>
-              <a:t>2/7/25</a:t>
+              <a:t>9/10/26</a:t>
             </a:fld>
             <a:endParaRPr lang="en-US"/>
           </a:p>
@@ -1840,7 +1840,7 @@
           <a:p>
             <a:fld id="{C8DDD9C9-7601-0A49-8CCB-092BA4B39752}" type="datetimeFigureOut">
               <a:rPr lang="en-US" smtClean="0"/>
-              <a:t>2/7/25</a:t>
+              <a:t>9/10/26</a:t>
             </a:fld>
             <a:endParaRPr lang="en-US"/>
           </a:p>
@@ -1982,7 +1982,7 @@
           <a:p>
             <a:fld id="{C8DDD9C9-7601-0A49-8CCB-092BA4B39752}" type="datetimeFigureOut">
               <a:rPr lang="en-US" smtClean="0"/>
-              <a:t>2/7/25</a:t>
+              <a:t>9/10/26</a:t>
             </a:fld>
             <a:endParaRPr lang="en-US"/>
           </a:p>
@@ -2095,7 +2095,7 @@
           <a:p>
             <a:fld id="{C8DDD9C9-7601-0A49-8CCB-092BA4B39752}" type="datetimeFigureOut">
               <a:rPr lang="en-US" smtClean="0"/>
-              <a:t>2/7/25</a:t>
+              <a:t>9/10/26</a:t>
             </a:fld>
             <a:endParaRPr lang="en-US"/>
           </a:p>
@@ -2408,7 +2408,7 @@
           <a:p>
             <a:fld id="{C8DDD9C9-7601-0A49-8CCB-092BA4B39752}" type="datetimeFigureOut">
               <a:rPr lang="en-US" smtClean="0"/>
-              <a:t>2/7/25</a:t>
+              <a:t>9/10/26</a:t>
             </a:fld>
             <a:endParaRPr lang="en-US"/>
           </a:p>
@@ -2697,7 +2697,7 @@
           <a:p>
             <a:fld id="{C8DDD9C9-7601-0A49-8CCB-092BA4B39752}" type="datetimeFigureOut">
               <a:rPr lang="en-US" smtClean="0"/>
-              <a:t>2/7/25</a:t>
+              <a:t>9/10/26</a:t>
             </a:fld>
             <a:endParaRPr lang="en-US"/>
           </a:p>
@@ -2940,7 +2940,7 @@
           <a:p>
             <a:fld id="{C8DDD9C9-7601-0A49-8CCB-092BA4B39752}" type="datetimeFigureOut">
               <a:rPr lang="en-US" smtClean="0"/>
-              <a:t>2/7/25</a:t>
+              <a:t>9/10/26</a:t>
             </a:fld>
             <a:endParaRPr lang="en-US"/>
           </a:p>
@@ -3033,6 +3033,54 @@
               <a:t>‹#›</a:t>
             </a:fld>
             <a:endParaRPr lang="en-US"/>
+          </a:p>
+        </p:txBody>
+      </p:sp>
+      <p:sp>
+        <p:nvSpPr>
+          <p:cNvPr id="8" name="TextBox 7">
+            <a:extLst>
+              <a:ext uri="{FF2B5EF4-FFF2-40B4-BE49-F238E27FC236}">
+                <a16:creationId xmlns:a16="http://schemas.microsoft.com/office/drawing/2014/main" id="{A2CFEFD2-DF8C-FFC0-0F7E-E868E1C0B2B3}"/>
+              </a:ext>
+            </a:extLst>
+          </p:cNvPr>
+          <p:cNvSpPr txBox="1"/>
+          <p:nvPr userDrawn="1">
+            <p:extLst>
+              <p:ext uri="{1162E1C5-73C7-4A58-AE30-91384D911F3F}">
+                <p184:classification xmlns:p184="http://schemas.microsoft.com/office/powerpoint/2018/4/main" val="ftr"/>
+              </p:ext>
+            </p:extLst>
+          </p:nvPr>
+        </p:nvSpPr>
+        <p:spPr>
+          <a:xfrm>
+            <a:off x="5278438" y="6611620"/>
+            <a:ext cx="1666875" cy="182880"/>
+          </a:xfrm>
+          <a:prstGeom prst="rect">
+            <a:avLst/>
+          </a:prstGeom>
+        </p:spPr>
+        <p:txBody>
+          <a:bodyPr horzOverflow="overflow" lIns="0" tIns="0" rIns="0" bIns="0">
+            <a:spAutoFit/>
+          </a:bodyPr>
+          <a:lstStyle/>
+          <a:p>
+            <a:pPr algn="l"/>
+            <a:r>
+              <a:rPr lang="en-US" sz="1200">
+                <a:solidFill>
+                  <a:srgbClr val="000000">
+                    <a:alpha val="50000"/>
+                  </a:srgbClr>
+                </a:solidFill>
+                <a:latin typeface="Aptos" panose="020B0004020202020204" pitchFamily="34" charset="0"/>
+              </a:rPr>
+              <a:t>ECU Internal Information</a:t>
+            </a:r>
           </a:p>
         </p:txBody>
       </p:sp>
@@ -4443,6 +4491,57 @@
           <a:chExt cx="0" cy="0"/>
         </a:xfrm>
       </p:grpSpPr>
+      <p:sp>
+        <p:nvSpPr>
+          <p:cNvPr id="15" name="Rounded Rectangle 14">
+            <a:extLst>
+              <a:ext uri="{FF2B5EF4-FFF2-40B4-BE49-F238E27FC236}">
+                <a16:creationId xmlns:a16="http://schemas.microsoft.com/office/drawing/2014/main" id="{65E1FA7E-3853-8D2C-6764-8B173FE49640}"/>
+              </a:ext>
+            </a:extLst>
+          </p:cNvPr>
+          <p:cNvSpPr/>
+          <p:nvPr/>
+        </p:nvSpPr>
+        <p:spPr>
+          <a:xfrm>
+            <a:off x="3237464" y="5320593"/>
+            <a:ext cx="3029301" cy="485794"/>
+          </a:xfrm>
+          <a:prstGeom prst="roundRect">
+            <a:avLst>
+              <a:gd name="adj" fmla="val 50000"/>
+            </a:avLst>
+          </a:prstGeom>
+          <a:solidFill>
+            <a:srgbClr val="FF7E79"/>
+          </a:solidFill>
+        </p:spPr>
+        <p:style>
+          <a:lnRef idx="2">
+            <a:schemeClr val="accent1">
+              <a:shade val="50000"/>
+            </a:schemeClr>
+          </a:lnRef>
+          <a:fillRef idx="1">
+            <a:schemeClr val="accent1"/>
+          </a:fillRef>
+          <a:effectRef idx="0">
+            <a:schemeClr val="accent1"/>
+          </a:effectRef>
+          <a:fontRef idx="minor">
+            <a:schemeClr val="lt1"/>
+          </a:fontRef>
+        </p:style>
+        <p:txBody>
+          <a:bodyPr rtlCol="0" anchor="ctr"/>
+          <a:lstStyle/>
+          <a:p>
+            <a:pPr algn="ctr"/>
+            <a:endParaRPr lang="en-US"/>
+          </a:p>
+        </p:txBody>
+      </p:sp>
       <p:grpSp>
         <p:nvGrpSpPr>
           <p:cNvPr id="10" name="Group 9">
@@ -4907,6 +5006,89 @@
           </a:p>
         </p:txBody>
       </p:sp>
+      <p:sp>
+        <p:nvSpPr>
+          <p:cNvPr id="13" name="TextBox 12">
+            <a:extLst>
+              <a:ext uri="{FF2B5EF4-FFF2-40B4-BE49-F238E27FC236}">
+                <a16:creationId xmlns:a16="http://schemas.microsoft.com/office/drawing/2014/main" id="{78E5FE57-4B7E-541D-47E4-0BF0C8A68137}"/>
+              </a:ext>
+            </a:extLst>
+          </p:cNvPr>
+          <p:cNvSpPr txBox="1"/>
+          <p:nvPr/>
+        </p:nvSpPr>
+        <p:spPr>
+          <a:xfrm>
+            <a:off x="3281080" y="5357308"/>
+            <a:ext cx="2395207" cy="369332"/>
+          </a:xfrm>
+          <a:prstGeom prst="rect">
+            <a:avLst/>
+          </a:prstGeom>
+          <a:noFill/>
+        </p:spPr>
+        <p:txBody>
+          <a:bodyPr wrap="none" rtlCol="0">
+            <a:spAutoFit/>
+          </a:bodyPr>
+          <a:lstStyle/>
+          <a:p>
+            <a:r>
+              <a:rPr lang="en-US" b="1" i="1" dirty="0">
+                <a:latin typeface="Eurostile" panose="020B0504020202050204" pitchFamily="34" charset="77"/>
+              </a:rPr>
+              <a:t>Send Back to QC:MXP</a:t>
+            </a:r>
+          </a:p>
+        </p:txBody>
+      </p:sp>
+      <p:sp>
+        <p:nvSpPr>
+          <p:cNvPr id="14" name="Right Arrow 13">
+            <a:extLst>
+              <a:ext uri="{FF2B5EF4-FFF2-40B4-BE49-F238E27FC236}">
+                <a16:creationId xmlns:a16="http://schemas.microsoft.com/office/drawing/2014/main" id="{C62E642B-090E-21A3-FC25-3AB7ED0822B9}"/>
+              </a:ext>
+            </a:extLst>
+          </p:cNvPr>
+          <p:cNvSpPr/>
+          <p:nvPr/>
+        </p:nvSpPr>
+        <p:spPr>
+          <a:xfrm>
+            <a:off x="5676287" y="5427233"/>
+            <a:ext cx="479833" cy="272514"/>
+          </a:xfrm>
+          <a:prstGeom prst="rightArrow">
+            <a:avLst/>
+          </a:prstGeom>
+        </p:spPr>
+        <p:style>
+          <a:lnRef idx="2">
+            <a:schemeClr val="accent1">
+              <a:shade val="15000"/>
+            </a:schemeClr>
+          </a:lnRef>
+          <a:fillRef idx="1">
+            <a:schemeClr val="accent1"/>
+          </a:fillRef>
+          <a:effectRef idx="0">
+            <a:schemeClr val="accent1"/>
+          </a:effectRef>
+          <a:fontRef idx="minor">
+            <a:schemeClr val="lt1"/>
+          </a:fontRef>
+        </p:style>
+        <p:txBody>
+          <a:bodyPr rtlCol="0" anchor="ctr"/>
+          <a:lstStyle/>
+          <a:p>
+            <a:pPr algn="ctr"/>
+            <a:endParaRPr lang="en-US"/>
+          </a:p>
+        </p:txBody>
+      </p:sp>
     </p:spTree>
     <p:extLst>
       <p:ext uri="{BB962C8B-B14F-4D97-AF65-F5344CB8AC3E}">
@@ -4937,192 +5119,213 @@
           <a:chExt cx="0" cy="0"/>
         </a:xfrm>
       </p:grpSpPr>
-      <p:sp>
-        <p:nvSpPr>
-          <p:cNvPr id="2" name="Oval 1">
-            <a:extLst>
-              <a:ext uri="{FF2B5EF4-FFF2-40B4-BE49-F238E27FC236}">
-                <a16:creationId xmlns:a16="http://schemas.microsoft.com/office/drawing/2014/main" id="{4BBE4831-A473-C514-9F3B-F86655C7F0E8}"/>
-              </a:ext>
-            </a:extLst>
-          </p:cNvPr>
-          <p:cNvSpPr/>
+      <p:grpSp>
+        <p:nvGrpSpPr>
+          <p:cNvPr id="3" name="Group 2">
+            <a:extLst>
+              <a:ext uri="{FF2B5EF4-FFF2-40B4-BE49-F238E27FC236}">
+                <a16:creationId xmlns:a16="http://schemas.microsoft.com/office/drawing/2014/main" id="{AD81AB1A-EFA9-61B3-AE88-1E9E05614AF0}"/>
+              </a:ext>
+            </a:extLst>
+          </p:cNvPr>
+          <p:cNvGrpSpPr/>
           <p:nvPr/>
-        </p:nvSpPr>
-        <p:spPr>
+        </p:nvGrpSpPr>
+        <p:grpSpPr>
           <a:xfrm>
             <a:off x="2647585" y="237007"/>
             <a:ext cx="5122757" cy="5164993"/>
+            <a:chOff x="2647585" y="237007"/>
+            <a:chExt cx="5122757" cy="5164993"/>
           </a:xfrm>
-          <a:prstGeom prst="ellipse">
-            <a:avLst/>
-          </a:prstGeom>
-          <a:solidFill>
-            <a:schemeClr val="bg1"/>
-          </a:solidFill>
-          <a:ln w="228600">
+        </p:grpSpPr>
+        <p:sp>
+          <p:nvSpPr>
+            <p:cNvPr id="2" name="Oval 1">
+              <a:extLst>
+                <a:ext uri="{FF2B5EF4-FFF2-40B4-BE49-F238E27FC236}">
+                  <a16:creationId xmlns:a16="http://schemas.microsoft.com/office/drawing/2014/main" id="{4BBE4831-A473-C514-9F3B-F86655C7F0E8}"/>
+                </a:ext>
+              </a:extLst>
+            </p:cNvPr>
+            <p:cNvSpPr/>
+            <p:nvPr/>
+          </p:nvSpPr>
+          <p:spPr>
+            <a:xfrm>
+              <a:off x="2647585" y="237007"/>
+              <a:ext cx="5122757" cy="5164993"/>
+            </a:xfrm>
+            <a:prstGeom prst="ellipse">
+              <a:avLst/>
+            </a:prstGeom>
             <a:solidFill>
-              <a:srgbClr val="FF0000"/>
+              <a:schemeClr val="bg1"/>
             </a:solidFill>
-          </a:ln>
-        </p:spPr>
-        <p:style>
-          <a:lnRef idx="2">
-            <a:schemeClr val="accent1">
-              <a:shade val="50000"/>
-            </a:schemeClr>
-          </a:lnRef>
-          <a:fillRef idx="1">
-            <a:schemeClr val="accent1"/>
-          </a:fillRef>
-          <a:effectRef idx="0">
-            <a:schemeClr val="accent1"/>
-          </a:effectRef>
-          <a:fontRef idx="minor">
-            <a:schemeClr val="lt1"/>
-          </a:fontRef>
-        </p:style>
-        <p:txBody>
-          <a:bodyPr rtlCol="0" anchor="ctr"/>
-          <a:lstStyle/>
-          <a:p>
-            <a:pPr algn="ctr"/>
-            <a:endParaRPr lang="en-US"/>
-          </a:p>
-        </p:txBody>
-      </p:sp>
-      <p:sp>
-        <p:nvSpPr>
-          <p:cNvPr id="4" name="TextBox 3">
-            <a:extLst>
-              <a:ext uri="{FF2B5EF4-FFF2-40B4-BE49-F238E27FC236}">
-                <a16:creationId xmlns:a16="http://schemas.microsoft.com/office/drawing/2014/main" id="{2204D766-12D2-A72A-6AA3-9DBA044C42F5}"/>
-              </a:ext>
-            </a:extLst>
-          </p:cNvPr>
-          <p:cNvSpPr txBox="1"/>
-          <p:nvPr/>
-        </p:nvSpPr>
-        <p:spPr>
-          <a:xfrm>
-            <a:off x="3596055" y="1456000"/>
-            <a:ext cx="3127844" cy="1746631"/>
-          </a:xfrm>
-          <a:prstGeom prst="rect">
-            <a:avLst/>
-          </a:prstGeom>
-          <a:noFill/>
-        </p:spPr>
-        <p:txBody>
-          <a:bodyPr wrap="none" rtlCol="0">
-            <a:spAutoFit/>
-          </a:bodyPr>
-          <a:lstStyle/>
-          <a:p>
-            <a:pPr algn="ctr">
-              <a:lnSpc>
-                <a:spcPts val="10000"/>
-              </a:lnSpc>
-            </a:pPr>
-            <a:r>
-              <a:rPr lang="en-US" sz="18000" b="1" dirty="0">
-                <a:solidFill>
-                  <a:srgbClr val="FF0000"/>
-                </a:solidFill>
-                <a:latin typeface="Tenorite" pitchFamily="2" charset="0"/>
-                <a:ea typeface="Krungthep" panose="02000400000000000000" pitchFamily="2" charset="-34"/>
-                <a:cs typeface="Futura Medium" panose="020B0602020204020303" pitchFamily="34" charset="-79"/>
-              </a:rPr>
-              <a:t>OC</a:t>
-            </a:r>
-          </a:p>
-        </p:txBody>
-      </p:sp>
-      <p:sp>
-        <p:nvSpPr>
-          <p:cNvPr id="6" name="TextBox 5">
-            <a:extLst>
-              <a:ext uri="{FF2B5EF4-FFF2-40B4-BE49-F238E27FC236}">
-                <a16:creationId xmlns:a16="http://schemas.microsoft.com/office/drawing/2014/main" id="{8DC45DB1-E144-2519-31AA-ED5FD8DDFBB1}"/>
-              </a:ext>
-            </a:extLst>
-          </p:cNvPr>
-          <p:cNvSpPr txBox="1"/>
-          <p:nvPr/>
-        </p:nvSpPr>
-        <p:spPr>
-          <a:xfrm>
-            <a:off x="3367785" y="2298587"/>
-            <a:ext cx="4257657" cy="2554545"/>
-          </a:xfrm>
-          <a:prstGeom prst="rect">
-            <a:avLst/>
-          </a:prstGeom>
-          <a:noFill/>
-        </p:spPr>
-        <p:txBody>
-          <a:bodyPr wrap="square" rtlCol="0">
-            <a:spAutoFit/>
-          </a:bodyPr>
-          <a:lstStyle/>
-          <a:p>
-            <a:r>
-              <a:rPr lang="en-US" sz="16000" dirty="0">
-                <a:solidFill>
-                  <a:srgbClr val="548235"/>
-                </a:solidFill>
-                <a:latin typeface="Nordique Inline" pitchFamily="2" charset="77"/>
-                <a:ea typeface="Ebrima" panose="02000000000000000000" pitchFamily="2" charset="0"/>
-                <a:cs typeface="Ebrima" panose="02000000000000000000" pitchFamily="2" charset="0"/>
-              </a:rPr>
-              <a:t>MXP</a:t>
-            </a:r>
-          </a:p>
-        </p:txBody>
-      </p:sp>
-      <p:cxnSp>
-        <p:nvCxnSpPr>
-          <p:cNvPr id="5" name="Straight Connector 4">
-            <a:extLst>
-              <a:ext uri="{FF2B5EF4-FFF2-40B4-BE49-F238E27FC236}">
-                <a16:creationId xmlns:a16="http://schemas.microsoft.com/office/drawing/2014/main" id="{78E181CB-E3B1-4639-1A75-A240D54F5B0C}"/>
-              </a:ext>
-            </a:extLst>
-          </p:cNvPr>
-          <p:cNvCxnSpPr>
-            <a:cxnSpLocks/>
-          </p:cNvCxnSpPr>
-          <p:nvPr/>
-        </p:nvCxnSpPr>
-        <p:spPr>
-          <a:xfrm>
-            <a:off x="4474177" y="1937356"/>
-            <a:ext cx="440723" cy="722461"/>
-          </a:xfrm>
-          <a:prstGeom prst="line">
-            <a:avLst/>
-          </a:prstGeom>
-          <a:ln w="228600">
-            <a:solidFill>
-              <a:srgbClr val="FF0000"/>
-            </a:solidFill>
-          </a:ln>
-        </p:spPr>
-        <p:style>
-          <a:lnRef idx="1">
-            <a:schemeClr val="accent1"/>
-          </a:lnRef>
-          <a:fillRef idx="0">
-            <a:schemeClr val="accent1"/>
-          </a:fillRef>
-          <a:effectRef idx="0">
-            <a:schemeClr val="accent1"/>
-          </a:effectRef>
-          <a:fontRef idx="minor">
-            <a:schemeClr val="tx1"/>
-          </a:fontRef>
-        </p:style>
-      </p:cxnSp>
+            <a:ln w="228600">
+              <a:solidFill>
+                <a:srgbClr val="FF0000"/>
+              </a:solidFill>
+            </a:ln>
+          </p:spPr>
+          <p:style>
+            <a:lnRef idx="2">
+              <a:schemeClr val="accent1">
+                <a:shade val="50000"/>
+              </a:schemeClr>
+            </a:lnRef>
+            <a:fillRef idx="1">
+              <a:schemeClr val="accent1"/>
+            </a:fillRef>
+            <a:effectRef idx="0">
+              <a:schemeClr val="accent1"/>
+            </a:effectRef>
+            <a:fontRef idx="minor">
+              <a:schemeClr val="lt1"/>
+            </a:fontRef>
+          </p:style>
+          <p:txBody>
+            <a:bodyPr rtlCol="0" anchor="ctr"/>
+            <a:lstStyle/>
+            <a:p>
+              <a:pPr algn="ctr"/>
+              <a:endParaRPr lang="en-US"/>
+            </a:p>
+          </p:txBody>
+        </p:sp>
+        <p:sp>
+          <p:nvSpPr>
+            <p:cNvPr id="4" name="TextBox 3">
+              <a:extLst>
+                <a:ext uri="{FF2B5EF4-FFF2-40B4-BE49-F238E27FC236}">
+                  <a16:creationId xmlns:a16="http://schemas.microsoft.com/office/drawing/2014/main" id="{2204D766-12D2-A72A-6AA3-9DBA044C42F5}"/>
+                </a:ext>
+              </a:extLst>
+            </p:cNvPr>
+            <p:cNvSpPr txBox="1"/>
+            <p:nvPr/>
+          </p:nvSpPr>
+          <p:spPr>
+            <a:xfrm>
+              <a:off x="3596055" y="1456000"/>
+              <a:ext cx="3127844" cy="1746631"/>
+            </a:xfrm>
+            <a:prstGeom prst="rect">
+              <a:avLst/>
+            </a:prstGeom>
+            <a:noFill/>
+          </p:spPr>
+          <p:txBody>
+            <a:bodyPr wrap="none" rtlCol="0">
+              <a:spAutoFit/>
+            </a:bodyPr>
+            <a:lstStyle/>
+            <a:p>
+              <a:pPr algn="ctr">
+                <a:lnSpc>
+                  <a:spcPts val="10000"/>
+                </a:lnSpc>
+              </a:pPr>
+              <a:r>
+                <a:rPr lang="en-US" sz="18000" b="1" dirty="0">
+                  <a:solidFill>
+                    <a:srgbClr val="FF0000"/>
+                  </a:solidFill>
+                  <a:latin typeface="Tenorite" pitchFamily="2" charset="0"/>
+                  <a:ea typeface="Krungthep" panose="02000400000000000000" pitchFamily="2" charset="-34"/>
+                  <a:cs typeface="Futura Medium" panose="020B0602020204020303" pitchFamily="34" charset="-79"/>
+                </a:rPr>
+                <a:t>OC</a:t>
+              </a:r>
+            </a:p>
+          </p:txBody>
+        </p:sp>
+        <p:sp>
+          <p:nvSpPr>
+            <p:cNvPr id="6" name="TextBox 5">
+              <a:extLst>
+                <a:ext uri="{FF2B5EF4-FFF2-40B4-BE49-F238E27FC236}">
+                  <a16:creationId xmlns:a16="http://schemas.microsoft.com/office/drawing/2014/main" id="{8DC45DB1-E144-2519-31AA-ED5FD8DDFBB1}"/>
+                </a:ext>
+              </a:extLst>
+            </p:cNvPr>
+            <p:cNvSpPr txBox="1"/>
+            <p:nvPr/>
+          </p:nvSpPr>
+          <p:spPr>
+            <a:xfrm>
+              <a:off x="3367785" y="2298587"/>
+              <a:ext cx="4257657" cy="2554545"/>
+            </a:xfrm>
+            <a:prstGeom prst="rect">
+              <a:avLst/>
+            </a:prstGeom>
+            <a:noFill/>
+          </p:spPr>
+          <p:txBody>
+            <a:bodyPr wrap="square" rtlCol="0">
+              <a:spAutoFit/>
+            </a:bodyPr>
+            <a:lstStyle/>
+            <a:p>
+              <a:r>
+                <a:rPr lang="en-US" sz="16000" dirty="0">
+                  <a:solidFill>
+                    <a:srgbClr val="548235"/>
+                  </a:solidFill>
+                  <a:latin typeface="Nordique Inline" pitchFamily="2" charset="77"/>
+                  <a:ea typeface="Ebrima" panose="02000000000000000000" pitchFamily="2" charset="0"/>
+                  <a:cs typeface="Ebrima" panose="02000000000000000000" pitchFamily="2" charset="0"/>
+                </a:rPr>
+                <a:t>MXP</a:t>
+              </a:r>
+            </a:p>
+          </p:txBody>
+        </p:sp>
+        <p:cxnSp>
+          <p:nvCxnSpPr>
+            <p:cNvPr id="5" name="Straight Connector 4">
+              <a:extLst>
+                <a:ext uri="{FF2B5EF4-FFF2-40B4-BE49-F238E27FC236}">
+                  <a16:creationId xmlns:a16="http://schemas.microsoft.com/office/drawing/2014/main" id="{78E181CB-E3B1-4639-1A75-A240D54F5B0C}"/>
+                </a:ext>
+              </a:extLst>
+            </p:cNvPr>
+            <p:cNvCxnSpPr>
+              <a:cxnSpLocks/>
+            </p:cNvCxnSpPr>
+            <p:nvPr/>
+          </p:nvCxnSpPr>
+          <p:spPr>
+            <a:xfrm>
+              <a:off x="4474177" y="1937356"/>
+              <a:ext cx="440723" cy="722461"/>
+            </a:xfrm>
+            <a:prstGeom prst="line">
+              <a:avLst/>
+            </a:prstGeom>
+            <a:ln w="228600">
+              <a:solidFill>
+                <a:srgbClr val="FF0000"/>
+              </a:solidFill>
+            </a:ln>
+          </p:spPr>
+          <p:style>
+            <a:lnRef idx="1">
+              <a:schemeClr val="accent1"/>
+            </a:lnRef>
+            <a:fillRef idx="0">
+              <a:schemeClr val="accent1"/>
+            </a:fillRef>
+            <a:effectRef idx="0">
+              <a:schemeClr val="accent1"/>
+            </a:effectRef>
+            <a:fontRef idx="minor">
+              <a:schemeClr val="tx1"/>
+            </a:fontRef>
+          </p:style>
+        </p:cxnSp>
+      </p:grpSp>
     </p:spTree>
     <p:extLst>
       <p:ext uri="{BB962C8B-B14F-4D97-AF65-F5344CB8AC3E}">
@@ -6753,10 +6956,10 @@
             <p:nvPr/>
           </p:nvPicPr>
           <p:blipFill>
-            <a:blip r:embed="rId2">
+            <a:blip>
               <a:extLst>
                 <a:ext uri="{96DAC541-7B7A-43D3-8B79-37D633B846F1}">
-                  <asvg:svgBlip xmlns:asvg="http://schemas.microsoft.com/office/drawing/2016/SVG/main" r:embed="rId3"/>
+                  <asvg:svgBlip xmlns:asvg="http://schemas.microsoft.com/office/drawing/2016/SVG/main" r:embed="rId2"/>
                 </a:ext>
               </a:extLst>
             </a:blip>
@@ -7070,10 +7273,10 @@
               <p:nvPr/>
             </p:nvPicPr>
             <p:blipFill>
-              <a:blip r:embed="rId2">
+              <a:blip>
                 <a:extLst>
                   <a:ext uri="{96DAC541-7B7A-43D3-8B79-37D633B846F1}">
-                    <asvg:svgBlip xmlns:asvg="http://schemas.microsoft.com/office/drawing/2016/SVG/main" r:embed="rId3"/>
+                    <asvg:svgBlip xmlns:asvg="http://schemas.microsoft.com/office/drawing/2016/SVG/main" r:embed="rId2"/>
                   </a:ext>
                 </a:extLst>
               </a:blip>
@@ -7290,10 +7493,10 @@
               <p:nvPr/>
             </p:nvPicPr>
             <p:blipFill>
-              <a:blip r:embed="rId2">
+              <a:blip>
                 <a:extLst>
                   <a:ext uri="{96DAC541-7B7A-43D3-8B79-37D633B846F1}">
-                    <asvg:svgBlip xmlns:asvg="http://schemas.microsoft.com/office/drawing/2016/SVG/main" r:embed="rId3"/>
+                    <asvg:svgBlip xmlns:asvg="http://schemas.microsoft.com/office/drawing/2016/SVG/main" r:embed="rId2"/>
                   </a:ext>
                 </a:extLst>
               </a:blip>
@@ -7637,10 +7840,10 @@
           <p:nvPr/>
         </p:nvPicPr>
         <p:blipFill>
-          <a:blip r:embed="rId4">
+          <a:blip>
             <a:extLst>
               <a:ext uri="{96DAC541-7B7A-43D3-8B79-37D633B846F1}">
-                <asvg:svgBlip xmlns:asvg="http://schemas.microsoft.com/office/drawing/2016/SVG/main" r:embed="rId5"/>
+                <asvg:svgBlip xmlns:asvg="http://schemas.microsoft.com/office/drawing/2016/SVG/main" r:embed="rId4"/>
               </a:ext>
             </a:extLst>
           </a:blip>
@@ -7715,58 +7918,58 @@
           <a:custGeom>
             <a:avLst/>
             <a:gdLst>
-              <a:gd name="connsiteX0" fmla="*/ 0 w 2489596"/>
-              <a:gd name="connsiteY0" fmla="*/ 722699 h 722699"/>
-              <a:gd name="connsiteX1" fmla="*/ 483181 w 2489596"/>
-              <a:gd name="connsiteY1" fmla="*/ 481799 h 722699"/>
-              <a:gd name="connsiteX2" fmla="*/ 937370 w 2489596"/>
-              <a:gd name="connsiteY2" fmla="*/ 255354 h 722699"/>
-              <a:gd name="connsiteX3" fmla="*/ 1449542 w 2489596"/>
-              <a:gd name="connsiteY3" fmla="*/ 0 h 722699"/>
-              <a:gd name="connsiteX4" fmla="*/ 1938367 w 2489596"/>
-              <a:gd name="connsiteY4" fmla="*/ 339669 h 722699"/>
-              <a:gd name="connsiteX5" fmla="*/ 2489596 w 2489596"/>
-              <a:gd name="connsiteY5" fmla="*/ 722699 h 722699"/>
-              <a:gd name="connsiteX6" fmla="*/ 1892093 w 2489596"/>
-              <a:gd name="connsiteY6" fmla="*/ 722699 h 722699"/>
-              <a:gd name="connsiteX7" fmla="*/ 1294590 w 2489596"/>
-              <a:gd name="connsiteY7" fmla="*/ 722699 h 722699"/>
-              <a:gd name="connsiteX8" fmla="*/ 622399 w 2489596"/>
-              <a:gd name="connsiteY8" fmla="*/ 722699 h 722699"/>
-              <a:gd name="connsiteX9" fmla="*/ 0 w 2489596"/>
-              <a:gd name="connsiteY9" fmla="*/ 722699 h 722699"/>
+              <a:gd name="csX0" fmla="*/ 0 w 2489596"/>
+              <a:gd name="csY0" fmla="*/ 722699 h 722699"/>
+              <a:gd name="csX1" fmla="*/ 483181 w 2489596"/>
+              <a:gd name="csY1" fmla="*/ 481799 h 722699"/>
+              <a:gd name="csX2" fmla="*/ 937370 w 2489596"/>
+              <a:gd name="csY2" fmla="*/ 255354 h 722699"/>
+              <a:gd name="csX3" fmla="*/ 1449542 w 2489596"/>
+              <a:gd name="csY3" fmla="*/ 0 h 722699"/>
+              <a:gd name="csX4" fmla="*/ 1938367 w 2489596"/>
+              <a:gd name="csY4" fmla="*/ 339669 h 722699"/>
+              <a:gd name="csX5" fmla="*/ 2489596 w 2489596"/>
+              <a:gd name="csY5" fmla="*/ 722699 h 722699"/>
+              <a:gd name="csX6" fmla="*/ 1892093 w 2489596"/>
+              <a:gd name="csY6" fmla="*/ 722699 h 722699"/>
+              <a:gd name="csX7" fmla="*/ 1294590 w 2489596"/>
+              <a:gd name="csY7" fmla="*/ 722699 h 722699"/>
+              <a:gd name="csX8" fmla="*/ 622399 w 2489596"/>
+              <a:gd name="csY8" fmla="*/ 722699 h 722699"/>
+              <a:gd name="csX9" fmla="*/ 0 w 2489596"/>
+              <a:gd name="csY9" fmla="*/ 722699 h 722699"/>
             </a:gdLst>
             <a:ahLst/>
             <a:cxnLst>
               <a:cxn ang="0">
-                <a:pos x="connsiteX0" y="connsiteY0"/>
+                <a:pos x="csX0" y="csY0"/>
               </a:cxn>
               <a:cxn ang="0">
-                <a:pos x="connsiteX1" y="connsiteY1"/>
+                <a:pos x="csX1" y="csY1"/>
               </a:cxn>
               <a:cxn ang="0">
-                <a:pos x="connsiteX2" y="connsiteY2"/>
+                <a:pos x="csX2" y="csY2"/>
               </a:cxn>
               <a:cxn ang="0">
-                <a:pos x="connsiteX3" y="connsiteY3"/>
+                <a:pos x="csX3" y="csY3"/>
               </a:cxn>
               <a:cxn ang="0">
-                <a:pos x="connsiteX4" y="connsiteY4"/>
+                <a:pos x="csX4" y="csY4"/>
               </a:cxn>
               <a:cxn ang="0">
-                <a:pos x="connsiteX5" y="connsiteY5"/>
+                <a:pos x="csX5" y="csY5"/>
               </a:cxn>
               <a:cxn ang="0">
-                <a:pos x="connsiteX6" y="connsiteY6"/>
+                <a:pos x="csX6" y="csY6"/>
               </a:cxn>
               <a:cxn ang="0">
-                <a:pos x="connsiteX7" y="connsiteY7"/>
+                <a:pos x="csX7" y="csY7"/>
               </a:cxn>
               <a:cxn ang="0">
-                <a:pos x="connsiteX8" y="connsiteY8"/>
+                <a:pos x="csX8" y="csY8"/>
               </a:cxn>
               <a:cxn ang="0">
-                <a:pos x="connsiteX9" y="connsiteY9"/>
+                <a:pos x="csX9" y="csY9"/>
               </a:cxn>
             </a:cxnLst>
             <a:rect l="l" t="t" r="r" b="b"/>
@@ -7887,48 +8090,48 @@
           <a:custGeom>
             <a:avLst/>
             <a:gdLst>
-              <a:gd name="connsiteX0" fmla="*/ 0 w 1945157"/>
-              <a:gd name="connsiteY0" fmla="*/ 717744 h 717744"/>
-              <a:gd name="connsiteX1" fmla="*/ 566274 w 1945157"/>
-              <a:gd name="connsiteY1" fmla="*/ 358872 h 717744"/>
-              <a:gd name="connsiteX2" fmla="*/ 1132548 w 1945157"/>
-              <a:gd name="connsiteY2" fmla="*/ 0 h 717744"/>
-              <a:gd name="connsiteX3" fmla="*/ 1530726 w 1945157"/>
-              <a:gd name="connsiteY3" fmla="*/ 351695 h 717744"/>
-              <a:gd name="connsiteX4" fmla="*/ 1945157 w 1945157"/>
-              <a:gd name="connsiteY4" fmla="*/ 717744 h 717744"/>
-              <a:gd name="connsiteX5" fmla="*/ 1316223 w 1945157"/>
-              <a:gd name="connsiteY5" fmla="*/ 717744 h 717744"/>
-              <a:gd name="connsiteX6" fmla="*/ 628934 w 1945157"/>
-              <a:gd name="connsiteY6" fmla="*/ 717744 h 717744"/>
-              <a:gd name="connsiteX7" fmla="*/ 0 w 1945157"/>
-              <a:gd name="connsiteY7" fmla="*/ 717744 h 717744"/>
+              <a:gd name="csX0" fmla="*/ 0 w 1945157"/>
+              <a:gd name="csY0" fmla="*/ 717744 h 717744"/>
+              <a:gd name="csX1" fmla="*/ 566274 w 1945157"/>
+              <a:gd name="csY1" fmla="*/ 358872 h 717744"/>
+              <a:gd name="csX2" fmla="*/ 1132548 w 1945157"/>
+              <a:gd name="csY2" fmla="*/ 0 h 717744"/>
+              <a:gd name="csX3" fmla="*/ 1530726 w 1945157"/>
+              <a:gd name="csY3" fmla="*/ 351695 h 717744"/>
+              <a:gd name="csX4" fmla="*/ 1945157 w 1945157"/>
+              <a:gd name="csY4" fmla="*/ 717744 h 717744"/>
+              <a:gd name="csX5" fmla="*/ 1316223 w 1945157"/>
+              <a:gd name="csY5" fmla="*/ 717744 h 717744"/>
+              <a:gd name="csX6" fmla="*/ 628934 w 1945157"/>
+              <a:gd name="csY6" fmla="*/ 717744 h 717744"/>
+              <a:gd name="csX7" fmla="*/ 0 w 1945157"/>
+              <a:gd name="csY7" fmla="*/ 717744 h 717744"/>
             </a:gdLst>
             <a:ahLst/>
             <a:cxnLst>
               <a:cxn ang="0">
-                <a:pos x="connsiteX0" y="connsiteY0"/>
+                <a:pos x="csX0" y="csY0"/>
               </a:cxn>
               <a:cxn ang="0">
-                <a:pos x="connsiteX1" y="connsiteY1"/>
+                <a:pos x="csX1" y="csY1"/>
               </a:cxn>
               <a:cxn ang="0">
-                <a:pos x="connsiteX2" y="connsiteY2"/>
+                <a:pos x="csX2" y="csY2"/>
               </a:cxn>
               <a:cxn ang="0">
-                <a:pos x="connsiteX3" y="connsiteY3"/>
+                <a:pos x="csX3" y="csY3"/>
               </a:cxn>
               <a:cxn ang="0">
-                <a:pos x="connsiteX4" y="connsiteY4"/>
+                <a:pos x="csX4" y="csY4"/>
               </a:cxn>
               <a:cxn ang="0">
-                <a:pos x="connsiteX5" y="connsiteY5"/>
+                <a:pos x="csX5" y="csY5"/>
               </a:cxn>
               <a:cxn ang="0">
-                <a:pos x="connsiteX6" y="connsiteY6"/>
+                <a:pos x="csX6" y="csY6"/>
               </a:cxn>
               <a:cxn ang="0">
-                <a:pos x="connsiteX7" y="connsiteY7"/>
+                <a:pos x="csX7" y="csY7"/>
               </a:cxn>
             </a:cxnLst>
             <a:rect l="l" t="t" r="r" b="b"/>
@@ -8039,58 +8242,58 @@
           <a:custGeom>
             <a:avLst/>
             <a:gdLst>
-              <a:gd name="connsiteX0" fmla="*/ 0 w 2444087"/>
-              <a:gd name="connsiteY0" fmla="*/ 542441 h 542441"/>
-              <a:gd name="connsiteX1" fmla="*/ 468801 w 2444087"/>
-              <a:gd name="connsiteY1" fmla="*/ 271221 h 542441"/>
-              <a:gd name="connsiteX2" fmla="*/ 937601 w 2444087"/>
-              <a:gd name="connsiteY2" fmla="*/ 0 h 542441"/>
-              <a:gd name="connsiteX3" fmla="*/ 1424698 w 2444087"/>
-              <a:gd name="connsiteY3" fmla="*/ 175389 h 542441"/>
-              <a:gd name="connsiteX4" fmla="*/ 1911795 w 2444087"/>
-              <a:gd name="connsiteY4" fmla="*/ 350779 h 542441"/>
-              <a:gd name="connsiteX5" fmla="*/ 2444087 w 2444087"/>
-              <a:gd name="connsiteY5" fmla="*/ 542441 h 542441"/>
-              <a:gd name="connsiteX6" fmla="*/ 1857506 w 2444087"/>
-              <a:gd name="connsiteY6" fmla="*/ 542441 h 542441"/>
-              <a:gd name="connsiteX7" fmla="*/ 1270925 w 2444087"/>
-              <a:gd name="connsiteY7" fmla="*/ 542441 h 542441"/>
-              <a:gd name="connsiteX8" fmla="*/ 611022 w 2444087"/>
-              <a:gd name="connsiteY8" fmla="*/ 542441 h 542441"/>
-              <a:gd name="connsiteX9" fmla="*/ 0 w 2444087"/>
-              <a:gd name="connsiteY9" fmla="*/ 542441 h 542441"/>
+              <a:gd name="csX0" fmla="*/ 0 w 2444087"/>
+              <a:gd name="csY0" fmla="*/ 542441 h 542441"/>
+              <a:gd name="csX1" fmla="*/ 468801 w 2444087"/>
+              <a:gd name="csY1" fmla="*/ 271221 h 542441"/>
+              <a:gd name="csX2" fmla="*/ 937601 w 2444087"/>
+              <a:gd name="csY2" fmla="*/ 0 h 542441"/>
+              <a:gd name="csX3" fmla="*/ 1424698 w 2444087"/>
+              <a:gd name="csY3" fmla="*/ 175389 h 542441"/>
+              <a:gd name="csX4" fmla="*/ 1911795 w 2444087"/>
+              <a:gd name="csY4" fmla="*/ 350779 h 542441"/>
+              <a:gd name="csX5" fmla="*/ 2444087 w 2444087"/>
+              <a:gd name="csY5" fmla="*/ 542441 h 542441"/>
+              <a:gd name="csX6" fmla="*/ 1857506 w 2444087"/>
+              <a:gd name="csY6" fmla="*/ 542441 h 542441"/>
+              <a:gd name="csX7" fmla="*/ 1270925 w 2444087"/>
+              <a:gd name="csY7" fmla="*/ 542441 h 542441"/>
+              <a:gd name="csX8" fmla="*/ 611022 w 2444087"/>
+              <a:gd name="csY8" fmla="*/ 542441 h 542441"/>
+              <a:gd name="csX9" fmla="*/ 0 w 2444087"/>
+              <a:gd name="csY9" fmla="*/ 542441 h 542441"/>
             </a:gdLst>
             <a:ahLst/>
             <a:cxnLst>
               <a:cxn ang="0">
-                <a:pos x="connsiteX0" y="connsiteY0"/>
+                <a:pos x="csX0" y="csY0"/>
               </a:cxn>
               <a:cxn ang="0">
-                <a:pos x="connsiteX1" y="connsiteY1"/>
+                <a:pos x="csX1" y="csY1"/>
               </a:cxn>
               <a:cxn ang="0">
-                <a:pos x="connsiteX2" y="connsiteY2"/>
+                <a:pos x="csX2" y="csY2"/>
               </a:cxn>
               <a:cxn ang="0">
-                <a:pos x="connsiteX3" y="connsiteY3"/>
+                <a:pos x="csX3" y="csY3"/>
               </a:cxn>
               <a:cxn ang="0">
-                <a:pos x="connsiteX4" y="connsiteY4"/>
+                <a:pos x="csX4" y="csY4"/>
               </a:cxn>
               <a:cxn ang="0">
-                <a:pos x="connsiteX5" y="connsiteY5"/>
+                <a:pos x="csX5" y="csY5"/>
               </a:cxn>
               <a:cxn ang="0">
-                <a:pos x="connsiteX6" y="connsiteY6"/>
+                <a:pos x="csX6" y="csY6"/>
               </a:cxn>
               <a:cxn ang="0">
-                <a:pos x="connsiteX7" y="connsiteY7"/>
+                <a:pos x="csX7" y="csY7"/>
               </a:cxn>
               <a:cxn ang="0">
-                <a:pos x="connsiteX8" y="connsiteY8"/>
+                <a:pos x="csX8" y="csY8"/>
               </a:cxn>
               <a:cxn ang="0">
-                <a:pos x="connsiteX9" y="connsiteY9"/>
+                <a:pos x="csX9" y="csY9"/>
               </a:cxn>
             </a:cxnLst>
             <a:rect l="l" t="t" r="r" b="b"/>
@@ -8211,33 +8414,33 @@
           <a:custGeom>
             <a:avLst/>
             <a:gdLst>
-              <a:gd name="connsiteX0" fmla="*/ 0 w 684000"/>
-              <a:gd name="connsiteY0" fmla="*/ 342000 h 684000"/>
-              <a:gd name="connsiteX1" fmla="*/ 342000 w 684000"/>
-              <a:gd name="connsiteY1" fmla="*/ 0 h 684000"/>
-              <a:gd name="connsiteX2" fmla="*/ 684000 w 684000"/>
-              <a:gd name="connsiteY2" fmla="*/ 342000 h 684000"/>
-              <a:gd name="connsiteX3" fmla="*/ 342000 w 684000"/>
-              <a:gd name="connsiteY3" fmla="*/ 684000 h 684000"/>
-              <a:gd name="connsiteX4" fmla="*/ 0 w 684000"/>
-              <a:gd name="connsiteY4" fmla="*/ 342000 h 684000"/>
+              <a:gd name="csX0" fmla="*/ 0 w 684000"/>
+              <a:gd name="csY0" fmla="*/ 342000 h 684000"/>
+              <a:gd name="csX1" fmla="*/ 342000 w 684000"/>
+              <a:gd name="csY1" fmla="*/ 0 h 684000"/>
+              <a:gd name="csX2" fmla="*/ 684000 w 684000"/>
+              <a:gd name="csY2" fmla="*/ 342000 h 684000"/>
+              <a:gd name="csX3" fmla="*/ 342000 w 684000"/>
+              <a:gd name="csY3" fmla="*/ 684000 h 684000"/>
+              <a:gd name="csX4" fmla="*/ 0 w 684000"/>
+              <a:gd name="csY4" fmla="*/ 342000 h 684000"/>
             </a:gdLst>
             <a:ahLst/>
             <a:cxnLst>
               <a:cxn ang="0">
-                <a:pos x="connsiteX0" y="connsiteY0"/>
+                <a:pos x="csX0" y="csY0"/>
               </a:cxn>
               <a:cxn ang="0">
-                <a:pos x="connsiteX1" y="connsiteY1"/>
+                <a:pos x="csX1" y="csY1"/>
               </a:cxn>
               <a:cxn ang="0">
-                <a:pos x="connsiteX2" y="connsiteY2"/>
+                <a:pos x="csX2" y="csY2"/>
               </a:cxn>
               <a:cxn ang="0">
-                <a:pos x="connsiteX3" y="connsiteY3"/>
+                <a:pos x="csX3" y="csY3"/>
               </a:cxn>
               <a:cxn ang="0">
-                <a:pos x="connsiteX4" y="connsiteY4"/>
+                <a:pos x="csX4" y="csY4"/>
               </a:cxn>
             </a:cxnLst>
             <a:rect l="l" t="t" r="r" b="b"/>
@@ -8362,33 +8565,33 @@
           <a:custGeom>
             <a:avLst/>
             <a:gdLst>
-              <a:gd name="connsiteX0" fmla="*/ 0 w 684000"/>
-              <a:gd name="connsiteY0" fmla="*/ 342000 h 684000"/>
-              <a:gd name="connsiteX1" fmla="*/ 342000 w 684000"/>
-              <a:gd name="connsiteY1" fmla="*/ 0 h 684000"/>
-              <a:gd name="connsiteX2" fmla="*/ 684000 w 684000"/>
-              <a:gd name="connsiteY2" fmla="*/ 342000 h 684000"/>
-              <a:gd name="connsiteX3" fmla="*/ 342000 w 684000"/>
-              <a:gd name="connsiteY3" fmla="*/ 684000 h 684000"/>
-              <a:gd name="connsiteX4" fmla="*/ 0 w 684000"/>
-              <a:gd name="connsiteY4" fmla="*/ 342000 h 684000"/>
+              <a:gd name="csX0" fmla="*/ 0 w 684000"/>
+              <a:gd name="csY0" fmla="*/ 342000 h 684000"/>
+              <a:gd name="csX1" fmla="*/ 342000 w 684000"/>
+              <a:gd name="csY1" fmla="*/ 0 h 684000"/>
+              <a:gd name="csX2" fmla="*/ 684000 w 684000"/>
+              <a:gd name="csY2" fmla="*/ 342000 h 684000"/>
+              <a:gd name="csX3" fmla="*/ 342000 w 684000"/>
+              <a:gd name="csY3" fmla="*/ 684000 h 684000"/>
+              <a:gd name="csX4" fmla="*/ 0 w 684000"/>
+              <a:gd name="csY4" fmla="*/ 342000 h 684000"/>
             </a:gdLst>
             <a:ahLst/>
             <a:cxnLst>
               <a:cxn ang="0">
-                <a:pos x="connsiteX0" y="connsiteY0"/>
+                <a:pos x="csX0" y="csY0"/>
               </a:cxn>
               <a:cxn ang="0">
-                <a:pos x="connsiteX1" y="connsiteY1"/>
+                <a:pos x="csX1" y="csY1"/>
               </a:cxn>
               <a:cxn ang="0">
-                <a:pos x="connsiteX2" y="connsiteY2"/>
+                <a:pos x="csX2" y="csY2"/>
               </a:cxn>
               <a:cxn ang="0">
-                <a:pos x="connsiteX3" y="connsiteY3"/>
+                <a:pos x="csX3" y="csY3"/>
               </a:cxn>
               <a:cxn ang="0">
-                <a:pos x="connsiteX4" y="connsiteY4"/>
+                <a:pos x="csX4" y="csY4"/>
               </a:cxn>
             </a:cxnLst>
             <a:rect l="l" t="t" r="r" b="b"/>
@@ -8513,33 +8716,33 @@
           <a:custGeom>
             <a:avLst/>
             <a:gdLst>
-              <a:gd name="connsiteX0" fmla="*/ 0 w 684000"/>
-              <a:gd name="connsiteY0" fmla="*/ 342000 h 684000"/>
-              <a:gd name="connsiteX1" fmla="*/ 342000 w 684000"/>
-              <a:gd name="connsiteY1" fmla="*/ 0 h 684000"/>
-              <a:gd name="connsiteX2" fmla="*/ 684000 w 684000"/>
-              <a:gd name="connsiteY2" fmla="*/ 342000 h 684000"/>
-              <a:gd name="connsiteX3" fmla="*/ 342000 w 684000"/>
-              <a:gd name="connsiteY3" fmla="*/ 684000 h 684000"/>
-              <a:gd name="connsiteX4" fmla="*/ 0 w 684000"/>
-              <a:gd name="connsiteY4" fmla="*/ 342000 h 684000"/>
+              <a:gd name="csX0" fmla="*/ 0 w 684000"/>
+              <a:gd name="csY0" fmla="*/ 342000 h 684000"/>
+              <a:gd name="csX1" fmla="*/ 342000 w 684000"/>
+              <a:gd name="csY1" fmla="*/ 0 h 684000"/>
+              <a:gd name="csX2" fmla="*/ 684000 w 684000"/>
+              <a:gd name="csY2" fmla="*/ 342000 h 684000"/>
+              <a:gd name="csX3" fmla="*/ 342000 w 684000"/>
+              <a:gd name="csY3" fmla="*/ 684000 h 684000"/>
+              <a:gd name="csX4" fmla="*/ 0 w 684000"/>
+              <a:gd name="csY4" fmla="*/ 342000 h 684000"/>
             </a:gdLst>
             <a:ahLst/>
             <a:cxnLst>
               <a:cxn ang="0">
-                <a:pos x="connsiteX0" y="connsiteY0"/>
+                <a:pos x="csX0" y="csY0"/>
               </a:cxn>
               <a:cxn ang="0">
-                <a:pos x="connsiteX1" y="connsiteY1"/>
+                <a:pos x="csX1" y="csY1"/>
               </a:cxn>
               <a:cxn ang="0">
-                <a:pos x="connsiteX2" y="connsiteY2"/>
+                <a:pos x="csX2" y="csY2"/>
               </a:cxn>
               <a:cxn ang="0">
-                <a:pos x="connsiteX3" y="connsiteY3"/>
+                <a:pos x="csX3" y="csY3"/>
               </a:cxn>
               <a:cxn ang="0">
-                <a:pos x="connsiteX4" y="connsiteY4"/>
+                <a:pos x="csX4" y="csY4"/>
               </a:cxn>
             </a:cxnLst>
             <a:rect l="l" t="t" r="r" b="b"/>
@@ -8664,33 +8867,33 @@
           <a:custGeom>
             <a:avLst/>
             <a:gdLst>
-              <a:gd name="connsiteX0" fmla="*/ 0 w 684000"/>
-              <a:gd name="connsiteY0" fmla="*/ 342000 h 684000"/>
-              <a:gd name="connsiteX1" fmla="*/ 342000 w 684000"/>
-              <a:gd name="connsiteY1" fmla="*/ 0 h 684000"/>
-              <a:gd name="connsiteX2" fmla="*/ 684000 w 684000"/>
-              <a:gd name="connsiteY2" fmla="*/ 342000 h 684000"/>
-              <a:gd name="connsiteX3" fmla="*/ 342000 w 684000"/>
-              <a:gd name="connsiteY3" fmla="*/ 684000 h 684000"/>
-              <a:gd name="connsiteX4" fmla="*/ 0 w 684000"/>
-              <a:gd name="connsiteY4" fmla="*/ 342000 h 684000"/>
+              <a:gd name="csX0" fmla="*/ 0 w 684000"/>
+              <a:gd name="csY0" fmla="*/ 342000 h 684000"/>
+              <a:gd name="csX1" fmla="*/ 342000 w 684000"/>
+              <a:gd name="csY1" fmla="*/ 0 h 684000"/>
+              <a:gd name="csX2" fmla="*/ 684000 w 684000"/>
+              <a:gd name="csY2" fmla="*/ 342000 h 684000"/>
+              <a:gd name="csX3" fmla="*/ 342000 w 684000"/>
+              <a:gd name="csY3" fmla="*/ 684000 h 684000"/>
+              <a:gd name="csX4" fmla="*/ 0 w 684000"/>
+              <a:gd name="csY4" fmla="*/ 342000 h 684000"/>
             </a:gdLst>
             <a:ahLst/>
             <a:cxnLst>
               <a:cxn ang="0">
-                <a:pos x="connsiteX0" y="connsiteY0"/>
+                <a:pos x="csX0" y="csY0"/>
               </a:cxn>
               <a:cxn ang="0">
-                <a:pos x="connsiteX1" y="connsiteY1"/>
+                <a:pos x="csX1" y="csY1"/>
               </a:cxn>
               <a:cxn ang="0">
-                <a:pos x="connsiteX2" y="connsiteY2"/>
+                <a:pos x="csX2" y="csY2"/>
               </a:cxn>
               <a:cxn ang="0">
-                <a:pos x="connsiteX3" y="connsiteY3"/>
+                <a:pos x="csX3" y="csY3"/>
               </a:cxn>
               <a:cxn ang="0">
-                <a:pos x="connsiteX4" y="connsiteY4"/>
+                <a:pos x="csX4" y="csY4"/>
               </a:cxn>
             </a:cxnLst>
             <a:rect l="l" t="t" r="r" b="b"/>
@@ -8810,7 +9013,7 @@
           <p:nvPr/>
         </p:nvPicPr>
         <p:blipFill>
-          <a:blip r:embed="rId6"/>
+          <a:blip r:embed="rId5"/>
           <a:stretch>
             <a:fillRect/>
           </a:stretch>
@@ -8936,7 +9139,7 @@
           <p:nvPr/>
         </p:nvPicPr>
         <p:blipFill>
-          <a:blip r:embed="rId7"/>
+          <a:blip r:embed="rId6"/>
           <a:stretch>
             <a:fillRect/>
           </a:stretch>
@@ -9100,7 +9303,7 @@
           <p:nvPr/>
         </p:nvPicPr>
         <p:blipFill>
-          <a:blip r:embed="rId7"/>
+          <a:blip r:embed="rId6"/>
           <a:stretch>
             <a:fillRect/>
           </a:stretch>
@@ -9491,10 +9694,10 @@
           <p:nvPr/>
         </p:nvPicPr>
         <p:blipFill>
-          <a:blip r:embed="rId2">
+          <a:blip>
             <a:extLst>
               <a:ext uri="{96DAC541-7B7A-43D3-8B79-37D633B846F1}">
-                <asvg:svgBlip xmlns:asvg="http://schemas.microsoft.com/office/drawing/2016/SVG/main" r:embed="rId3"/>
+                <asvg:svgBlip xmlns:asvg="http://schemas.microsoft.com/office/drawing/2016/SVG/main" r:embed="rId2"/>
               </a:ext>
             </a:extLst>
           </a:blip>
@@ -9734,10 +9937,10 @@
           <p:nvPr/>
         </p:nvPicPr>
         <p:blipFill>
-          <a:blip r:embed="rId2">
+          <a:blip>
             <a:extLst>
               <a:ext uri="{96DAC541-7B7A-43D3-8B79-37D633B846F1}">
-                <asvg:svgBlip xmlns:asvg="http://schemas.microsoft.com/office/drawing/2016/SVG/main" r:embed="rId3"/>
+                <asvg:svgBlip xmlns:asvg="http://schemas.microsoft.com/office/drawing/2016/SVG/main" r:embed="rId2"/>
               </a:ext>
             </a:extLst>
           </a:blip>

--- a/res/sandbox.pptx
+++ b/res/sandbox.pptx
@@ -16,6 +16,8 @@
     <p:sldId id="261" r:id="rId10"/>
     <p:sldId id="263" r:id="rId11"/>
     <p:sldId id="264" r:id="rId12"/>
+    <p:sldId id="267" r:id="rId13"/>
+    <p:sldId id="268" r:id="rId14"/>
   </p:sldIdLst>
   <p:sldSz cx="12192000" cy="6858000"/>
   <p:notesSz cx="6858000" cy="9144000"/>
@@ -271,7 +273,7 @@
           <a:p>
             <a:fld id="{C8DDD9C9-7601-0A49-8CCB-092BA4B39752}" type="datetimeFigureOut">
               <a:rPr lang="en-US" smtClean="0"/>
-              <a:t>9/10/26</a:t>
+              <a:t>10/14/26</a:t>
             </a:fld>
             <a:endParaRPr lang="en-US"/>
           </a:p>
@@ -471,7 +473,7 @@
           <a:p>
             <a:fld id="{C8DDD9C9-7601-0A49-8CCB-092BA4B39752}" type="datetimeFigureOut">
               <a:rPr lang="en-US" smtClean="0"/>
-              <a:t>9/10/26</a:t>
+              <a:t>10/14/26</a:t>
             </a:fld>
             <a:endParaRPr lang="en-US"/>
           </a:p>
@@ -681,7 +683,7 @@
           <a:p>
             <a:fld id="{C8DDD9C9-7601-0A49-8CCB-092BA4B39752}" type="datetimeFigureOut">
               <a:rPr lang="en-US" smtClean="0"/>
-              <a:t>9/10/26</a:t>
+              <a:t>10/14/26</a:t>
             </a:fld>
             <a:endParaRPr lang="en-US"/>
           </a:p>
@@ -881,7 +883,7 @@
           <a:p>
             <a:fld id="{C8DDD9C9-7601-0A49-8CCB-092BA4B39752}" type="datetimeFigureOut">
               <a:rPr lang="en-US" smtClean="0"/>
-              <a:t>9/10/26</a:t>
+              <a:t>10/14/26</a:t>
             </a:fld>
             <a:endParaRPr lang="en-US"/>
           </a:p>
@@ -1157,7 +1159,7 @@
           <a:p>
             <a:fld id="{C8DDD9C9-7601-0A49-8CCB-092BA4B39752}" type="datetimeFigureOut">
               <a:rPr lang="en-US" smtClean="0"/>
-              <a:t>9/10/26</a:t>
+              <a:t>10/14/26</a:t>
             </a:fld>
             <a:endParaRPr lang="en-US"/>
           </a:p>
@@ -1425,7 +1427,7 @@
           <a:p>
             <a:fld id="{C8DDD9C9-7601-0A49-8CCB-092BA4B39752}" type="datetimeFigureOut">
               <a:rPr lang="en-US" smtClean="0"/>
-              <a:t>9/10/26</a:t>
+              <a:t>10/14/26</a:t>
             </a:fld>
             <a:endParaRPr lang="en-US"/>
           </a:p>
@@ -1840,7 +1842,7 @@
           <a:p>
             <a:fld id="{C8DDD9C9-7601-0A49-8CCB-092BA4B39752}" type="datetimeFigureOut">
               <a:rPr lang="en-US" smtClean="0"/>
-              <a:t>9/10/26</a:t>
+              <a:t>10/14/26</a:t>
             </a:fld>
             <a:endParaRPr lang="en-US"/>
           </a:p>
@@ -1982,7 +1984,7 @@
           <a:p>
             <a:fld id="{C8DDD9C9-7601-0A49-8CCB-092BA4B39752}" type="datetimeFigureOut">
               <a:rPr lang="en-US" smtClean="0"/>
-              <a:t>9/10/26</a:t>
+              <a:t>10/14/26</a:t>
             </a:fld>
             <a:endParaRPr lang="en-US"/>
           </a:p>
@@ -2095,7 +2097,7 @@
           <a:p>
             <a:fld id="{C8DDD9C9-7601-0A49-8CCB-092BA4B39752}" type="datetimeFigureOut">
               <a:rPr lang="en-US" smtClean="0"/>
-              <a:t>9/10/26</a:t>
+              <a:t>10/14/26</a:t>
             </a:fld>
             <a:endParaRPr lang="en-US"/>
           </a:p>
@@ -2408,7 +2410,7 @@
           <a:p>
             <a:fld id="{C8DDD9C9-7601-0A49-8CCB-092BA4B39752}" type="datetimeFigureOut">
               <a:rPr lang="en-US" smtClean="0"/>
-              <a:t>9/10/26</a:t>
+              <a:t>10/14/26</a:t>
             </a:fld>
             <a:endParaRPr lang="en-US"/>
           </a:p>
@@ -2697,7 +2699,7 @@
           <a:p>
             <a:fld id="{C8DDD9C9-7601-0A49-8CCB-092BA4B39752}" type="datetimeFigureOut">
               <a:rPr lang="en-US" smtClean="0"/>
-              <a:t>9/10/26</a:t>
+              <a:t>10/14/26</a:t>
             </a:fld>
             <a:endParaRPr lang="en-US"/>
           </a:p>
@@ -2940,7 +2942,7 @@
           <a:p>
             <a:fld id="{C8DDD9C9-7601-0A49-8CCB-092BA4B39752}" type="datetimeFigureOut">
               <a:rPr lang="en-US" smtClean="0"/>
-              <a:t>9/10/26</a:t>
+              <a:t>10/14/26</a:t>
             </a:fld>
             <a:endParaRPr lang="en-US"/>
           </a:p>
@@ -5339,6 +5341,420 @@
 </p:sld>
 </file>
 
+<file path=ppt/slides/slide12.xml><?xml version="1.0" encoding="utf-8"?>
+<p:sld xmlns:a="http://schemas.openxmlformats.org/drawingml/2006/main" xmlns:r="http://schemas.openxmlformats.org/officeDocument/2006/relationships" xmlns:p="http://schemas.openxmlformats.org/presentationml/2006/main">
+  <p:cSld>
+    <p:spTree>
+      <p:nvGrpSpPr>
+        <p:cNvPr id="1" name="">
+          <a:extLst>
+            <a:ext uri="{FF2B5EF4-FFF2-40B4-BE49-F238E27FC236}">
+              <a16:creationId xmlns:a16="http://schemas.microsoft.com/office/drawing/2014/main" id="{8C422DD3-E937-FDC9-C8F6-3D4AF2C9D6B8}"/>
+            </a:ext>
+          </a:extLst>
+        </p:cNvPr>
+        <p:cNvGrpSpPr/>
+        <p:nvPr/>
+      </p:nvGrpSpPr>
+      <p:grpSpPr>
+        <a:xfrm>
+          <a:off x="0" y="0"/>
+          <a:ext cx="0" cy="0"/>
+          <a:chOff x="0" y="0"/>
+          <a:chExt cx="0" cy="0"/>
+        </a:xfrm>
+      </p:grpSpPr>
+      <p:sp>
+        <p:nvSpPr>
+          <p:cNvPr id="9" name="Rounded Rectangle 8">
+            <a:extLst>
+              <a:ext uri="{FF2B5EF4-FFF2-40B4-BE49-F238E27FC236}">
+                <a16:creationId xmlns:a16="http://schemas.microsoft.com/office/drawing/2014/main" id="{33DD0DE0-26CA-FA39-B72F-B02CE05AB8C2}"/>
+              </a:ext>
+            </a:extLst>
+          </p:cNvPr>
+          <p:cNvSpPr/>
+          <p:nvPr/>
+        </p:nvSpPr>
+        <p:spPr>
+          <a:xfrm>
+            <a:off x="1861073" y="1385047"/>
+            <a:ext cx="4765638" cy="4069080"/>
+          </a:xfrm>
+          <a:prstGeom prst="roundRect">
+            <a:avLst>
+              <a:gd name="adj" fmla="val 9825"/>
+            </a:avLst>
+          </a:prstGeom>
+          <a:solidFill>
+            <a:schemeClr val="tx1"/>
+          </a:solidFill>
+          <a:ln>
+            <a:noFill/>
+          </a:ln>
+        </p:spPr>
+        <p:style>
+          <a:lnRef idx="2">
+            <a:schemeClr val="accent1">
+              <a:shade val="15000"/>
+            </a:schemeClr>
+          </a:lnRef>
+          <a:fillRef idx="1">
+            <a:schemeClr val="accent1"/>
+          </a:fillRef>
+          <a:effectRef idx="0">
+            <a:schemeClr val="accent1"/>
+          </a:effectRef>
+          <a:fontRef idx="minor">
+            <a:schemeClr val="lt1"/>
+          </a:fontRef>
+        </p:style>
+        <p:txBody>
+          <a:bodyPr rtlCol="0" anchor="ctr"/>
+          <a:lstStyle/>
+          <a:p>
+            <a:pPr algn="ctr"/>
+            <a:endParaRPr lang="en-US"/>
+          </a:p>
+        </p:txBody>
+      </p:sp>
+      <p:pic>
+        <p:nvPicPr>
+          <p:cNvPr id="8" name="Picture 7">
+            <a:extLst>
+              <a:ext uri="{FF2B5EF4-FFF2-40B4-BE49-F238E27FC236}">
+                <a16:creationId xmlns:a16="http://schemas.microsoft.com/office/drawing/2014/main" id="{D1EEA0A8-32DA-5296-673A-6DC4B84DF1BB}"/>
+              </a:ext>
+            </a:extLst>
+          </p:cNvPr>
+          <p:cNvPicPr>
+            <a:picLocks noChangeAspect="1"/>
+          </p:cNvPicPr>
+          <p:nvPr/>
+        </p:nvPicPr>
+        <p:blipFill>
+          <a:blip r:embed="rId2"/>
+          <a:stretch>
+            <a:fillRect/>
+          </a:stretch>
+        </p:blipFill>
+        <p:spPr>
+          <a:xfrm>
+            <a:off x="3711388" y="1284406"/>
+            <a:ext cx="5584720" cy="4289188"/>
+          </a:xfrm>
+          <a:prstGeom prst="rect">
+            <a:avLst/>
+          </a:prstGeom>
+        </p:spPr>
+      </p:pic>
+      <p:sp>
+        <p:nvSpPr>
+          <p:cNvPr id="10" name="Rectangle 9">
+            <a:extLst>
+              <a:ext uri="{FF2B5EF4-FFF2-40B4-BE49-F238E27FC236}">
+                <a16:creationId xmlns:a16="http://schemas.microsoft.com/office/drawing/2014/main" id="{D2C7D300-0142-2CA8-1466-353A6612D7C7}"/>
+              </a:ext>
+            </a:extLst>
+          </p:cNvPr>
+          <p:cNvSpPr/>
+          <p:nvPr/>
+        </p:nvSpPr>
+        <p:spPr>
+          <a:xfrm>
+            <a:off x="2334409" y="1785769"/>
+            <a:ext cx="4292302" cy="1818042"/>
+          </a:xfrm>
+          <a:prstGeom prst="rect">
+            <a:avLst/>
+          </a:prstGeom>
+          <a:solidFill>
+            <a:schemeClr val="bg1"/>
+          </a:solidFill>
+          <a:ln>
+            <a:noFill/>
+          </a:ln>
+        </p:spPr>
+        <p:style>
+          <a:lnRef idx="2">
+            <a:schemeClr val="accent1">
+              <a:shade val="15000"/>
+            </a:schemeClr>
+          </a:lnRef>
+          <a:fillRef idx="1">
+            <a:schemeClr val="accent1"/>
+          </a:fillRef>
+          <a:effectRef idx="0">
+            <a:schemeClr val="accent1"/>
+          </a:effectRef>
+          <a:fontRef idx="minor">
+            <a:schemeClr val="lt1"/>
+          </a:fontRef>
+        </p:style>
+        <p:txBody>
+          <a:bodyPr rtlCol="0" anchor="ctr"/>
+          <a:lstStyle/>
+          <a:p>
+            <a:pPr algn="ctr"/>
+            <a:endParaRPr lang="en-US"/>
+          </a:p>
+        </p:txBody>
+      </p:sp>
+      <p:sp>
+        <p:nvSpPr>
+          <p:cNvPr id="11" name="TextBox 10">
+            <a:extLst>
+              <a:ext uri="{FF2B5EF4-FFF2-40B4-BE49-F238E27FC236}">
+                <a16:creationId xmlns:a16="http://schemas.microsoft.com/office/drawing/2014/main" id="{AD3A480C-D2E3-D031-7AA5-F933AD03DD07}"/>
+              </a:ext>
+            </a:extLst>
+          </p:cNvPr>
+          <p:cNvSpPr txBox="1"/>
+          <p:nvPr/>
+        </p:nvSpPr>
+        <p:spPr>
+          <a:xfrm>
+            <a:off x="2248349" y="1449791"/>
+            <a:ext cx="4742580" cy="2400657"/>
+          </a:xfrm>
+          <a:prstGeom prst="rect">
+            <a:avLst/>
+          </a:prstGeom>
+          <a:noFill/>
+        </p:spPr>
+        <p:txBody>
+          <a:bodyPr wrap="none" rtlCol="0">
+            <a:spAutoFit/>
+          </a:bodyPr>
+          <a:lstStyle/>
+          <a:p>
+            <a:r>
+              <a:rPr lang="en-US" sz="15000" b="1" dirty="0"/>
+              <a:t>STATS</a:t>
+            </a:r>
+          </a:p>
+        </p:txBody>
+      </p:sp>
+    </p:spTree>
+    <p:extLst>
+      <p:ext uri="{BB962C8B-B14F-4D97-AF65-F5344CB8AC3E}">
+        <p14:creationId xmlns:p14="http://schemas.microsoft.com/office/powerpoint/2010/main" val="2629310854"/>
+      </p:ext>
+    </p:extLst>
+  </p:cSld>
+  <p:clrMapOvr>
+    <a:masterClrMapping/>
+  </p:clrMapOvr>
+</p:sld>
+</file>
+
+<file path=ppt/slides/slide13.xml><?xml version="1.0" encoding="utf-8"?>
+<p:sld xmlns:a="http://schemas.openxmlformats.org/drawingml/2006/main" xmlns:r="http://schemas.openxmlformats.org/officeDocument/2006/relationships" xmlns:p="http://schemas.openxmlformats.org/presentationml/2006/main">
+  <p:cSld>
+    <p:spTree>
+      <p:nvGrpSpPr>
+        <p:cNvPr id="1" name="">
+          <a:extLst>
+            <a:ext uri="{FF2B5EF4-FFF2-40B4-BE49-F238E27FC236}">
+              <a16:creationId xmlns:a16="http://schemas.microsoft.com/office/drawing/2014/main" id="{093B6747-A941-3B6F-A5F6-5F4E66540CE9}"/>
+            </a:ext>
+          </a:extLst>
+        </p:cNvPr>
+        <p:cNvGrpSpPr/>
+        <p:nvPr/>
+      </p:nvGrpSpPr>
+      <p:grpSpPr>
+        <a:xfrm>
+          <a:off x="0" y="0"/>
+          <a:ext cx="0" cy="0"/>
+          <a:chOff x="0" y="0"/>
+          <a:chExt cx="0" cy="0"/>
+        </a:xfrm>
+      </p:grpSpPr>
+      <p:sp>
+        <p:nvSpPr>
+          <p:cNvPr id="9" name="Rounded Rectangle 8">
+            <a:extLst>
+              <a:ext uri="{FF2B5EF4-FFF2-40B4-BE49-F238E27FC236}">
+                <a16:creationId xmlns:a16="http://schemas.microsoft.com/office/drawing/2014/main" id="{542916AA-BB28-6986-6502-6F9BD3A42894}"/>
+              </a:ext>
+            </a:extLst>
+          </p:cNvPr>
+          <p:cNvSpPr/>
+          <p:nvPr/>
+        </p:nvSpPr>
+        <p:spPr>
+          <a:xfrm>
+            <a:off x="1861073" y="1385047"/>
+            <a:ext cx="4765638" cy="4069080"/>
+          </a:xfrm>
+          <a:prstGeom prst="roundRect">
+            <a:avLst>
+              <a:gd name="adj" fmla="val 9825"/>
+            </a:avLst>
+          </a:prstGeom>
+          <a:solidFill>
+            <a:schemeClr val="tx1"/>
+          </a:solidFill>
+          <a:ln>
+            <a:noFill/>
+          </a:ln>
+        </p:spPr>
+        <p:style>
+          <a:lnRef idx="2">
+            <a:schemeClr val="accent1">
+              <a:shade val="15000"/>
+            </a:schemeClr>
+          </a:lnRef>
+          <a:fillRef idx="1">
+            <a:schemeClr val="accent1"/>
+          </a:fillRef>
+          <a:effectRef idx="0">
+            <a:schemeClr val="accent1"/>
+          </a:effectRef>
+          <a:fontRef idx="minor">
+            <a:schemeClr val="lt1"/>
+          </a:fontRef>
+        </p:style>
+        <p:txBody>
+          <a:bodyPr rtlCol="0" anchor="ctr"/>
+          <a:lstStyle/>
+          <a:p>
+            <a:pPr algn="ctr"/>
+            <a:endParaRPr lang="en-US"/>
+          </a:p>
+        </p:txBody>
+      </p:sp>
+      <p:pic>
+        <p:nvPicPr>
+          <p:cNvPr id="8" name="Picture 7">
+            <a:extLst>
+              <a:ext uri="{FF2B5EF4-FFF2-40B4-BE49-F238E27FC236}">
+                <a16:creationId xmlns:a16="http://schemas.microsoft.com/office/drawing/2014/main" id="{94DCD178-330B-45EF-2DFB-6BE8B38F1441}"/>
+              </a:ext>
+            </a:extLst>
+          </p:cNvPr>
+          <p:cNvPicPr>
+            <a:picLocks noChangeAspect="1"/>
+          </p:cNvPicPr>
+          <p:nvPr/>
+        </p:nvPicPr>
+        <p:blipFill>
+          <a:blip r:embed="rId2"/>
+          <a:stretch>
+            <a:fillRect/>
+          </a:stretch>
+        </p:blipFill>
+        <p:spPr>
+          <a:xfrm>
+            <a:off x="3711388" y="1284406"/>
+            <a:ext cx="5584720" cy="4289188"/>
+          </a:xfrm>
+          <a:prstGeom prst="rect">
+            <a:avLst/>
+          </a:prstGeom>
+        </p:spPr>
+      </p:pic>
+      <p:sp>
+        <p:nvSpPr>
+          <p:cNvPr id="10" name="Rectangle 9">
+            <a:extLst>
+              <a:ext uri="{FF2B5EF4-FFF2-40B4-BE49-F238E27FC236}">
+                <a16:creationId xmlns:a16="http://schemas.microsoft.com/office/drawing/2014/main" id="{B40708DB-C5D7-101B-628E-5A82BDD99000}"/>
+              </a:ext>
+            </a:extLst>
+          </p:cNvPr>
+          <p:cNvSpPr/>
+          <p:nvPr/>
+        </p:nvSpPr>
+        <p:spPr>
+          <a:xfrm>
+            <a:off x="2334409" y="1785769"/>
+            <a:ext cx="4292302" cy="1818042"/>
+          </a:xfrm>
+          <a:prstGeom prst="rect">
+            <a:avLst/>
+          </a:prstGeom>
+          <a:solidFill>
+            <a:schemeClr val="bg1"/>
+          </a:solidFill>
+          <a:ln>
+            <a:noFill/>
+          </a:ln>
+        </p:spPr>
+        <p:style>
+          <a:lnRef idx="2">
+            <a:schemeClr val="accent1">
+              <a:shade val="15000"/>
+            </a:schemeClr>
+          </a:lnRef>
+          <a:fillRef idx="1">
+            <a:schemeClr val="accent1"/>
+          </a:fillRef>
+          <a:effectRef idx="0">
+            <a:schemeClr val="accent1"/>
+          </a:effectRef>
+          <a:fontRef idx="minor">
+            <a:schemeClr val="lt1"/>
+          </a:fontRef>
+        </p:style>
+        <p:txBody>
+          <a:bodyPr rtlCol="0" anchor="ctr"/>
+          <a:lstStyle/>
+          <a:p>
+            <a:pPr algn="ctr"/>
+            <a:endParaRPr lang="en-US"/>
+          </a:p>
+        </p:txBody>
+      </p:sp>
+      <p:sp>
+        <p:nvSpPr>
+          <p:cNvPr id="11" name="TextBox 10">
+            <a:extLst>
+              <a:ext uri="{FF2B5EF4-FFF2-40B4-BE49-F238E27FC236}">
+                <a16:creationId xmlns:a16="http://schemas.microsoft.com/office/drawing/2014/main" id="{49F58D57-3B4C-CD16-B2FF-BEC3E8200E24}"/>
+              </a:ext>
+            </a:extLst>
+          </p:cNvPr>
+          <p:cNvSpPr txBox="1"/>
+          <p:nvPr/>
+        </p:nvSpPr>
+        <p:spPr>
+          <a:xfrm>
+            <a:off x="2366687" y="1449791"/>
+            <a:ext cx="4199483" cy="2400657"/>
+          </a:xfrm>
+          <a:prstGeom prst="rect">
+            <a:avLst/>
+          </a:prstGeom>
+          <a:noFill/>
+        </p:spPr>
+        <p:txBody>
+          <a:bodyPr wrap="none" rtlCol="0">
+            <a:spAutoFit/>
+          </a:bodyPr>
+          <a:lstStyle/>
+          <a:p>
+            <a:r>
+              <a:rPr lang="en-US" sz="15000" b="1" dirty="0"/>
+              <a:t>PLOT</a:t>
+            </a:r>
+          </a:p>
+        </p:txBody>
+      </p:sp>
+    </p:spTree>
+    <p:extLst>
+      <p:ext uri="{BB962C8B-B14F-4D97-AF65-F5344CB8AC3E}">
+        <p14:creationId xmlns:p14="http://schemas.microsoft.com/office/powerpoint/2010/main" val="3588635685"/>
+      </p:ext>
+    </p:extLst>
+  </p:cSld>
+  <p:clrMapOvr>
+    <a:masterClrMapping/>
+  </p:clrMapOvr>
+</p:sld>
+</file>
+
 <file path=ppt/slides/slide2.xml><?xml version="1.0" encoding="utf-8"?>
 <p:sld xmlns:a="http://schemas.openxmlformats.org/drawingml/2006/main" xmlns:r="http://schemas.openxmlformats.org/officeDocument/2006/relationships" xmlns:p="http://schemas.openxmlformats.org/presentationml/2006/main">
   <p:cSld>

--- a/res/sandbox.pptx
+++ b/res/sandbox.pptx
@@ -273,7 +273,7 @@
           <a:p>
             <a:fld id="{C8DDD9C9-7601-0A49-8CCB-092BA4B39752}" type="datetimeFigureOut">
               <a:rPr lang="en-US" smtClean="0"/>
-              <a:t>10/14/26</a:t>
+              <a:t>10/20/26</a:t>
             </a:fld>
             <a:endParaRPr lang="en-US"/>
           </a:p>
@@ -473,7 +473,7 @@
           <a:p>
             <a:fld id="{C8DDD9C9-7601-0A49-8CCB-092BA4B39752}" type="datetimeFigureOut">
               <a:rPr lang="en-US" smtClean="0"/>
-              <a:t>10/14/26</a:t>
+              <a:t>10/20/26</a:t>
             </a:fld>
             <a:endParaRPr lang="en-US"/>
           </a:p>
@@ -683,7 +683,7 @@
           <a:p>
             <a:fld id="{C8DDD9C9-7601-0A49-8CCB-092BA4B39752}" type="datetimeFigureOut">
               <a:rPr lang="en-US" smtClean="0"/>
-              <a:t>10/14/26</a:t>
+              <a:t>10/20/26</a:t>
             </a:fld>
             <a:endParaRPr lang="en-US"/>
           </a:p>
@@ -883,7 +883,7 @@
           <a:p>
             <a:fld id="{C8DDD9C9-7601-0A49-8CCB-092BA4B39752}" type="datetimeFigureOut">
               <a:rPr lang="en-US" smtClean="0"/>
-              <a:t>10/14/26</a:t>
+              <a:t>10/20/26</a:t>
             </a:fld>
             <a:endParaRPr lang="en-US"/>
           </a:p>
@@ -1159,7 +1159,7 @@
           <a:p>
             <a:fld id="{C8DDD9C9-7601-0A49-8CCB-092BA4B39752}" type="datetimeFigureOut">
               <a:rPr lang="en-US" smtClean="0"/>
-              <a:t>10/14/26</a:t>
+              <a:t>10/20/26</a:t>
             </a:fld>
             <a:endParaRPr lang="en-US"/>
           </a:p>
@@ -1427,7 +1427,7 @@
           <a:p>
             <a:fld id="{C8DDD9C9-7601-0A49-8CCB-092BA4B39752}" type="datetimeFigureOut">
               <a:rPr lang="en-US" smtClean="0"/>
-              <a:t>10/14/26</a:t>
+              <a:t>10/20/26</a:t>
             </a:fld>
             <a:endParaRPr lang="en-US"/>
           </a:p>
@@ -1842,7 +1842,7 @@
           <a:p>
             <a:fld id="{C8DDD9C9-7601-0A49-8CCB-092BA4B39752}" type="datetimeFigureOut">
               <a:rPr lang="en-US" smtClean="0"/>
-              <a:t>10/14/26</a:t>
+              <a:t>10/20/26</a:t>
             </a:fld>
             <a:endParaRPr lang="en-US"/>
           </a:p>
@@ -1984,7 +1984,7 @@
           <a:p>
             <a:fld id="{C8DDD9C9-7601-0A49-8CCB-092BA4B39752}" type="datetimeFigureOut">
               <a:rPr lang="en-US" smtClean="0"/>
-              <a:t>10/14/26</a:t>
+              <a:t>10/20/26</a:t>
             </a:fld>
             <a:endParaRPr lang="en-US"/>
           </a:p>
@@ -2097,7 +2097,7 @@
           <a:p>
             <a:fld id="{C8DDD9C9-7601-0A49-8CCB-092BA4B39752}" type="datetimeFigureOut">
               <a:rPr lang="en-US" smtClean="0"/>
-              <a:t>10/14/26</a:t>
+              <a:t>10/20/26</a:t>
             </a:fld>
             <a:endParaRPr lang="en-US"/>
           </a:p>
@@ -2410,7 +2410,7 @@
           <a:p>
             <a:fld id="{C8DDD9C9-7601-0A49-8CCB-092BA4B39752}" type="datetimeFigureOut">
               <a:rPr lang="en-US" smtClean="0"/>
-              <a:t>10/14/26</a:t>
+              <a:t>10/20/26</a:t>
             </a:fld>
             <a:endParaRPr lang="en-US"/>
           </a:p>
@@ -2699,7 +2699,7 @@
           <a:p>
             <a:fld id="{C8DDD9C9-7601-0A49-8CCB-092BA4B39752}" type="datetimeFigureOut">
               <a:rPr lang="en-US" smtClean="0"/>
-              <a:t>10/14/26</a:t>
+              <a:t>10/20/26</a:t>
             </a:fld>
             <a:endParaRPr lang="en-US"/>
           </a:p>
@@ -2942,7 +2942,7 @@
           <a:p>
             <a:fld id="{C8DDD9C9-7601-0A49-8CCB-092BA4B39752}" type="datetimeFigureOut">
               <a:rPr lang="en-US" smtClean="0"/>
-              <a:t>10/14/26</a:t>
+              <a:t>10/20/26</a:t>
             </a:fld>
             <a:endParaRPr lang="en-US"/>
           </a:p>
@@ -9677,7 +9677,7 @@
         <p:spPr>
           <a:xfrm>
             <a:off x="795152" y="3640089"/>
-            <a:ext cx="4136069" cy="830997"/>
+            <a:ext cx="5521063" cy="830997"/>
           </a:xfrm>
           <a:prstGeom prst="rect">
             <a:avLst/>
@@ -9690,6 +9690,17 @@
           </a:bodyPr>
           <a:lstStyle/>
           <a:p>
+            <a:r>
+              <a:rPr lang="en-US" sz="4800" b="1" i="1" dirty="0" err="1">
+                <a:solidFill>
+                  <a:srgbClr val="5C604D"/>
+                </a:solidFill>
+                <a:latin typeface="Eurostile" panose="020B0504020202050204" pitchFamily="34" charset="77"/>
+                <a:ea typeface="Krungthep" panose="02000400000000000000" pitchFamily="2" charset="-34"/>
+                <a:cs typeface="Futura Medium" panose="020B0602020204020303" pitchFamily="34" charset="-79"/>
+              </a:rPr>
+              <a:t>MultiBatch</a:t>
+            </a:r>
             <a:r>
               <a:rPr lang="en-US" sz="4800" b="1" i="1" dirty="0">
                 <a:solidFill>
@@ -9699,7 +9710,7 @@
                 <a:ea typeface="Krungthep" panose="02000400000000000000" pitchFamily="2" charset="-34"/>
                 <a:cs typeface="Futura Medium" panose="020B0602020204020303" pitchFamily="34" charset="-79"/>
               </a:rPr>
-              <a:t>Batch Explorer</a:t>
+              <a:t> Explorer</a:t>
             </a:r>
           </a:p>
         </p:txBody>
@@ -9727,6 +9738,78 @@
         <p:spPr>
           <a:xfrm>
             <a:off x="320938" y="3891715"/>
+            <a:ext cx="426737" cy="327743"/>
+          </a:xfrm>
+          <a:prstGeom prst="rect">
+            <a:avLst/>
+          </a:prstGeom>
+        </p:spPr>
+      </p:pic>
+      <p:sp>
+        <p:nvSpPr>
+          <p:cNvPr id="12" name="TextBox 11">
+            <a:extLst>
+              <a:ext uri="{FF2B5EF4-FFF2-40B4-BE49-F238E27FC236}">
+                <a16:creationId xmlns:a16="http://schemas.microsoft.com/office/drawing/2014/main" id="{70783416-5A9D-048D-9B48-A222C3F58A6F}"/>
+              </a:ext>
+            </a:extLst>
+          </p:cNvPr>
+          <p:cNvSpPr txBox="1"/>
+          <p:nvPr/>
+        </p:nvSpPr>
+        <p:spPr>
+          <a:xfrm>
+            <a:off x="832756" y="4535286"/>
+            <a:ext cx="5194051" cy="830997"/>
+          </a:xfrm>
+          <a:prstGeom prst="rect">
+            <a:avLst/>
+          </a:prstGeom>
+          <a:noFill/>
+        </p:spPr>
+        <p:txBody>
+          <a:bodyPr wrap="none" rtlCol="0">
+            <a:spAutoFit/>
+          </a:bodyPr>
+          <a:lstStyle/>
+          <a:p>
+            <a:r>
+              <a:rPr lang="en-US" sz="4800" b="1" i="1" dirty="0">
+                <a:solidFill>
+                  <a:srgbClr val="5C604D"/>
+                </a:solidFill>
+                <a:latin typeface="Eurostile" panose="020B0504020202050204" pitchFamily="34" charset="77"/>
+                <a:ea typeface="Krungthep" panose="02000400000000000000" pitchFamily="2" charset="-34"/>
+                <a:cs typeface="Futura Medium" panose="020B0602020204020303" pitchFamily="34" charset="-79"/>
+              </a:rPr>
+              <a:t>Algorithm Explorer</a:t>
+            </a:r>
+          </a:p>
+        </p:txBody>
+      </p:sp>
+      <p:pic>
+        <p:nvPicPr>
+          <p:cNvPr id="14" name="Picture 13" descr="A black background with a black square&#10;&#10;Description automatically generated with medium confidence">
+            <a:extLst>
+              <a:ext uri="{FF2B5EF4-FFF2-40B4-BE49-F238E27FC236}">
+                <a16:creationId xmlns:a16="http://schemas.microsoft.com/office/drawing/2014/main" id="{CAC391EC-AF69-E032-B53F-2BDBCEBCB269}"/>
+              </a:ext>
+            </a:extLst>
+          </p:cNvPr>
+          <p:cNvPicPr>
+            <a:picLocks noChangeAspect="1"/>
+          </p:cNvPicPr>
+          <p:nvPr/>
+        </p:nvPicPr>
+        <p:blipFill>
+          <a:blip r:embed="rId6"/>
+          <a:stretch>
+            <a:fillRect/>
+          </a:stretch>
+        </p:blipFill>
+        <p:spPr>
+          <a:xfrm>
+            <a:off x="358542" y="4786912"/>
             <a:ext cx="426737" cy="327743"/>
           </a:xfrm>
           <a:prstGeom prst="rect">
